--- a/data-eng/decks/w2d2s1.pptx
+++ b/data-eng/decks/w2d2s1.pptx
@@ -5462,7 +5462,7 @@
                 <a:ea typeface="Pretendard"/>
                 <a:cs typeface="Pretendard"/>
               </a:rPr>
-              <a:t>docker start de-mysql 뒤 shop 접속</a:t>
+              <a:t>start → port: 3306 확인 → LANG 붙여 접속</a:t>
             </a:r>
           </a:p>
         </p:txBody>
@@ -11608,7 +11608,7 @@
                 <a:ea typeface="Pretendard"/>
                 <a:cs typeface="Pretendard"/>
               </a:rPr>
-              <a:t>ROWS BETWEEN … 으로 창(frame)을 직접 지정 가능</a:t>
+              <a:t>기본 창은 RANGE — ORDER BY 값이 같은 행(동점)도 함께</a:t>
             </a:r>
           </a:p>
         </p:txBody>
@@ -12224,7 +12224,7 @@
                 <a:ea typeface="Pretendard"/>
                 <a:cs typeface="Pretendard"/>
               </a:rPr>
-              <a:t>동점 처리</a:t>
+              <a:t>결과의 특징</a:t>
             </a:r>
           </a:p>
         </p:txBody>

--- a/data-eng/decks/w2d2s1.pptx
+++ b/data-eng/decks/w2d2s1.pptx
@@ -9971,7 +9971,7 @@
                 <a:ea typeface="Pretendard"/>
                 <a:cs typeface="Pretendard"/>
               </a:rPr>
-              <a:t>원래 행이 사라진다 — 카테고리 합계를 구하면 개별 월 데이터가 없어진다</a:t>
+              <a:t>원래 행이 사라진다 — 합계를 구하면 개별 월이 없어진다</a:t>
             </a:r>
           </a:p>
         </p:txBody>
@@ -11361,7 +11361,7 @@
                 <a:ea typeface="Pretendard"/>
                 <a:cs typeface="Pretendard"/>
               </a:rPr>
-              <a:t>SUM(amount) OVER (PARTITION BY category ORDER BY ym)</a:t>
+              <a:t>SUM(amount) OVER (… ORDER BY ym)</a:t>
             </a:r>
           </a:p>
         </p:txBody>
